--- a/demo/src/main/assets/samples/sample.pptx
+++ b/demo/src/main/assets/samples/sample.pptx
@@ -2946,25 +2946,25 @@
 </file>
 
 <file path=ppt/showcase/colors/slides/slide1.xml><?xml version="1.0" encoding="utf-8"?>
-<p:sld xmlns:p="http://schemas.openxmlformats.org/presentationml/2006/main" xmlns:a="http://schemas.openxmlformats.org/drawingml/2006/main" xmlns:r="http://schemas.openxmlformats.org/officeDocument/2006/relationships">
+<p:sld xmlns:p="http://schemas.openxmlformats.org/presentationml/2006/main" xmlns:a="http://schemas.openxmlformats.org/drawingml/2006/main">
   <p:cSld>
     <p:bg>
       <p:bgPr>
         <a:solidFill>
-          <a:srgbClr val="FF0000"/>
+          <a:srgbClr val="172B46"/>
         </a:solidFill>
       </p:bgPr>
     </p:bg>
     <p:spTree>
       <p:nvGrpSpPr>
-        <p:cNvPr id="3" name="Showcase canvas"/>
+        <p:cNvPr id="8" name="Showcase canvas"/>
         <p:cNvGrpSpPr/>
         <p:nvPr/>
       </p:nvGrpSpPr>
       <p:grpSpPr/>
       <p:grpSp>
         <p:nvGrpSpPr>
-          <p:cNvPr id="4" name="Source slide, centered"/>
+          <p:cNvPr id="9" name="Source slide, centered"/>
           <p:cNvGrpSpPr/>
           <p:nvPr/>
         </p:nvGrpSpPr>
@@ -2978,34 +2978,168 @@
         </p:grpSpPr>
         <p:sp>
           <p:nvSpPr>
-            <p:cNvPr id="2" name="Gold title"/>
-            <p:cNvSpPr txBox="1"/>
-            <p:nvPr/>
-          </p:nvSpPr>
-          <p:spPr>
-            <a:xfrm>
-              <a:off x="1171222" y="1171222"/>
-              <a:ext cx="6090356" cy="1639711"/>
-            </a:xfrm>
-            <a:prstGeom prst="rect">
-              <a:avLst/>
-            </a:prstGeom>
-            <a:noFill/>
-            <a:ln>
-              <a:noFill/>
-            </a:ln>
+            <p:cNvPr id="2" name="Text color comparison"/>
+            <p:cNvSpPr txBox="1"/>
+            <p:nvPr/>
+          </p:nvSpPr>
+          <p:spPr>
+            <a:xfrm>
+              <a:off x="468489" y="234244"/>
+              <a:ext cx="7495822" cy="843280"/>
+            </a:xfrm>
+            <a:noFill/>
           </p:spPr>
           <p:txBody>
             <a:bodyPr lIns="0" rIns="0" tIns="0" bIns="0"/>
             <a:lstStyle/>
             <a:p>
               <a:r>
-                <a:rPr lang="en-US" sz="5902">
+                <a:rPr sz="1844" b="0">
+                  <a:solidFill>
+                    <a:srgbClr val="C3D1E0"/>
+                  </a:solidFill>
+                </a:rPr>
+                <a:t>亮金色 · #FFC852</a:t>
+              </a:r>
+            </a:p>
+          </p:txBody>
+        </p:sp>
+        <p:sp>
+          <p:nvSpPr>
+            <p:cNvPr id="3" name="Text color comparison"/>
+            <p:cNvSpPr txBox="1"/>
+            <p:nvPr/>
+          </p:nvSpPr>
+          <p:spPr>
+            <a:xfrm>
+              <a:off x="468489" y="585611"/>
+              <a:ext cx="7495822" cy="843280"/>
+            </a:xfrm>
+            <a:noFill/>
+          </p:spPr>
+          <p:txBody>
+            <a:bodyPr lIns="0" rIns="0" tIns="0" bIns="0"/>
+            <a:lstStyle/>
+            <a:p>
+              <a:r>
+                <a:rPr sz="4796" b="1">
+                  <a:solidFill>
+                    <a:srgbClr val="FFC852"/>
+                  </a:solidFill>
+                </a:rPr>
+                <a:t>文字填色 Aa 123</a:t>
+              </a:r>
+            </a:p>
+          </p:txBody>
+        </p:sp>
+        <p:sp>
+          <p:nvSpPr>
+            <p:cNvPr id="4" name="Text color comparison"/>
+            <p:cNvSpPr txBox="1"/>
+            <p:nvPr/>
+          </p:nvSpPr>
+          <p:spPr>
+            <a:xfrm>
+              <a:off x="468489" y="1709984"/>
+              <a:ext cx="7495822" cy="843280"/>
+            </a:xfrm>
+            <a:noFill/>
+          </p:spPr>
+          <p:txBody>
+            <a:bodyPr lIns="0" rIns="0" tIns="0" bIns="0"/>
+            <a:lstStyle/>
+            <a:p>
+              <a:r>
+                <a:rPr sz="1844" b="0">
+                  <a:solidFill>
+                    <a:srgbClr val="C3D1E0"/>
+                  </a:solidFill>
+                </a:rPr>
+                <a:t>浅金色 · #FFF3DD</a:t>
+              </a:r>
+            </a:p>
+          </p:txBody>
+        </p:sp>
+        <p:sp>
+          <p:nvSpPr>
+            <p:cNvPr id="5" name="Text color comparison"/>
+            <p:cNvSpPr txBox="1"/>
+            <p:nvPr/>
+          </p:nvSpPr>
+          <p:spPr>
+            <a:xfrm>
+              <a:off x="468489" y="2061351"/>
+              <a:ext cx="7495822" cy="843280"/>
+            </a:xfrm>
+            <a:noFill/>
+          </p:spPr>
+          <p:txBody>
+            <a:bodyPr lIns="0" rIns="0" tIns="0" bIns="0"/>
+            <a:lstStyle/>
+            <a:p>
+              <a:r>
+                <a:rPr sz="4796" b="1">
                   <a:solidFill>
                     <a:srgbClr val="FFF3DD"/>
                   </a:solidFill>
                 </a:rPr>
-                <a:t>Gold title</a:t>
+                <a:t>文字填色 Aa 123</a:t>
+              </a:r>
+            </a:p>
+          </p:txBody>
+        </p:sp>
+        <p:sp>
+          <p:nvSpPr>
+            <p:cNvPr id="6" name="Text color comparison"/>
+            <p:cNvSpPr txBox="1"/>
+            <p:nvPr/>
+          </p:nvSpPr>
+          <p:spPr>
+            <a:xfrm>
+              <a:off x="468489" y="3185724"/>
+              <a:ext cx="7495822" cy="843280"/>
+            </a:xfrm>
+            <a:noFill/>
+          </p:spPr>
+          <p:txBody>
+            <a:bodyPr lIns="0" rIns="0" tIns="0" bIns="0"/>
+            <a:lstStyle/>
+            <a:p>
+              <a:r>
+                <a:rPr sz="1844" b="0">
+                  <a:solidFill>
+                    <a:srgbClr val="C3D1E0"/>
+                  </a:solidFill>
+                </a:rPr>
+                <a:t>白色参照 · #FFFFFF</a:t>
+              </a:r>
+            </a:p>
+          </p:txBody>
+        </p:sp>
+        <p:sp>
+          <p:nvSpPr>
+            <p:cNvPr id="7" name="Text color comparison"/>
+            <p:cNvSpPr txBox="1"/>
+            <p:nvPr/>
+          </p:nvSpPr>
+          <p:spPr>
+            <a:xfrm>
+              <a:off x="468489" y="3537091"/>
+              <a:ext cx="7495822" cy="843280"/>
+            </a:xfrm>
+            <a:noFill/>
+          </p:spPr>
+          <p:txBody>
+            <a:bodyPr lIns="0" rIns="0" tIns="0" bIns="0"/>
+            <a:lstStyle/>
+            <a:p>
+              <a:r>
+                <a:rPr sz="4796" b="1">
+                  <a:solidFill>
+                    <a:srgbClr val="FFFFFF"/>
+                  </a:solidFill>
+                </a:rPr>
+                <a:t>文字填色 Aa 123</a:t>
               </a:r>
             </a:p>
           </p:txBody>
@@ -3013,7 +3147,7 @@
       </p:grpSp>
       <p:sp>
         <p:nvSpPr>
-          <p:cNvPr id="5" name="Showcase explanation"/>
+          <p:cNvPr id="10" name="Showcase explanation"/>
           <p:cNvSpPr txBox="1"/>
           <p:nvPr/>
         </p:nvSpPr>
@@ -3045,14 +3179,14 @@
                   <a:srgbClr val="FFFFFF"/>
                 </a:solidFill>
               </a:rPr>
-              <a:t>文字填色 · 纯色参照</a:t>
+              <a:t>文字填色 · 亮金与浅金对照</a:t>
             </a:r>
           </a:p>
         </p:txBody>
       </p:sp>
       <p:sp>
         <p:nvSpPr>
-          <p:cNvPr id="6" name="Showcase explanation"/>
+          <p:cNvPr id="11" name="Showcase explanation"/>
           <p:cNvSpPr txBox="1"/>
           <p:nvPr/>
         </p:nvSpPr>
@@ -3102,9 +3236,9 @@
                   <a:srgbClr val="102238"/>
                 </a:solidFill>
               </a:rPr>
-              <a:t>相同文字指定纯色
-色值为 FFF3DD
-不使用渐变或主题色</a:t>
+              <a:t>同样文字、字号和背景
+依次使用亮金、浅金
+和白色三种纯色</a:t>
             </a:r>
           </a:p>
           <a:p>
@@ -3140,16 +3274,16 @@
                   <a:srgbClr val="102238"/>
                 </a:solidFill>
               </a:rPr>
-              <a:t>浅金色文字接近前页
-输入不同，显示应接近
-用于核对代表色解析</a:t>
+              <a:t>亮金色应明显偏黄
+浅金色较接近白色
+对照可见填色差别</a:t>
             </a:r>
           </a:p>
         </p:txBody>
       </p:sp>
       <p:sp>
         <p:nvSpPr>
-          <p:cNvPr id="7" name="Example boundary"/>
+          <p:cNvPr id="12" name="Example boundary"/>
           <p:cNvSpPr/>
           <p:nvPr/>
         </p:nvSpPr>
@@ -3176,25 +3310,25 @@
 </file>
 
 <file path=ppt/showcase/colors/slides/slide2.xml><?xml version="1.0" encoding="utf-8"?>
-<p:sld xmlns:p="http://schemas.openxmlformats.org/presentationml/2006/main" xmlns:a="http://schemas.openxmlformats.org/drawingml/2006/main" xmlns:r="http://schemas.openxmlformats.org/officeDocument/2006/relationships">
+<p:sld xmlns:p="http://schemas.openxmlformats.org/presentationml/2006/main" xmlns:a="http://schemas.openxmlformats.org/drawingml/2006/main">
   <p:cSld>
     <p:bg>
       <p:bgPr>
         <a:solidFill>
-          <a:srgbClr val="FF0000"/>
+          <a:srgbClr val="172B46"/>
         </a:solidFill>
       </p:bgPr>
     </p:bg>
     <p:spTree>
       <p:nvGrpSpPr>
-        <p:cNvPr id="3" name="Showcase canvas"/>
+        <p:cNvPr id="8" name="Showcase canvas"/>
         <p:cNvGrpSpPr/>
         <p:nvPr/>
       </p:nvGrpSpPr>
       <p:grpSpPr/>
       <p:grpSp>
         <p:nvGrpSpPr>
-          <p:cNvPr id="4" name="Source slide, centered"/>
+          <p:cNvPr id="9" name="Source slide, centered"/>
           <p:cNvGrpSpPr/>
           <p:nvPr/>
         </p:nvGrpSpPr>
@@ -3208,45 +3342,176 @@
         </p:grpSpPr>
         <p:sp>
           <p:nvSpPr>
-            <p:cNvPr id="2" name="Gold title"/>
-            <p:cNvSpPr txBox="1"/>
-            <p:nvPr/>
-          </p:nvSpPr>
-          <p:spPr>
-            <a:xfrm>
-              <a:off x="1171222" y="1171222"/>
-              <a:ext cx="6090356" cy="1639711"/>
-            </a:xfrm>
-            <a:prstGeom prst="rect">
-              <a:avLst/>
-            </a:prstGeom>
-            <a:noFill/>
-            <a:ln>
-              <a:noFill/>
-            </a:ln>
+            <p:cNvPr id="2" name="Text color comparison"/>
+            <p:cNvSpPr txBox="1"/>
+            <p:nvPr/>
+          </p:nvSpPr>
+          <p:spPr>
+            <a:xfrm>
+              <a:off x="468489" y="234244"/>
+              <a:ext cx="7495822" cy="843280"/>
+            </a:xfrm>
+            <a:noFill/>
           </p:spPr>
           <p:txBody>
             <a:bodyPr lIns="0" rIns="0" tIns="0" bIns="0"/>
             <a:lstStyle/>
             <a:p>
               <a:r>
-                <a:rPr lang="en-US" sz="5902">
+                <a:rPr sz="1844" b="0">
+                  <a:solidFill>
+                    <a:srgbClr val="C3D1E0"/>
+                  </a:solidFill>
+                </a:rPr>
+                <a:t>渐变输入 · 中点色预览</a:t>
+              </a:r>
+            </a:p>
+          </p:txBody>
+        </p:sp>
+        <p:sp>
+          <p:nvSpPr>
+            <p:cNvPr id="3" name="Text color comparison"/>
+            <p:cNvSpPr txBox="1"/>
+            <p:nvPr/>
+          </p:nvSpPr>
+          <p:spPr>
+            <a:xfrm>
+              <a:off x="468489" y="585611"/>
+              <a:ext cx="7495822" cy="843280"/>
+            </a:xfrm>
+            <a:noFill/>
+          </p:spPr>
+          <p:txBody>
+            <a:bodyPr lIns="0" rIns="0" tIns="0" bIns="0"/>
+            <a:lstStyle/>
+            <a:p>
+              <a:r>
+                <a:rPr sz="4796" b="1">
                   <a:gradFill>
                     <a:gsLst>
-                      <a:gs pos="30000">
-                        <a:srgbClr val="FFFAEB"/>
+                      <a:gs pos="0">
+                        <a:srgbClr val="FFD54F"/>
                       </a:gs>
                       <a:gs pos="100000">
-                        <a:schemeClr val="accent4">
-                          <a:lumMod val="40000"/>
-                          <a:lumOff val="60000"/>
-                        </a:schemeClr>
+                        <a:schemeClr val="accent4"/>
                       </a:gs>
                     </a:gsLst>
                     <a:lin ang="5400000" scaled="0"/>
                   </a:gradFill>
                 </a:rPr>
-                <a:t>Gold title</a:t>
+                <a:t>文字填色 Aa 123</a:t>
+              </a:r>
+            </a:p>
+          </p:txBody>
+        </p:sp>
+        <p:sp>
+          <p:nvSpPr>
+            <p:cNvPr id="4" name="Text color comparison"/>
+            <p:cNvSpPr txBox="1"/>
+            <p:nvPr/>
+          </p:nvSpPr>
+          <p:spPr>
+            <a:xfrm>
+              <a:off x="468489" y="1709984"/>
+              <a:ext cx="7495822" cy="843280"/>
+            </a:xfrm>
+            <a:noFill/>
+          </p:spPr>
+          <p:txBody>
+            <a:bodyPr lIns="0" rIns="0" tIns="0" bIns="0"/>
+            <a:lstStyle/>
+            <a:p>
+              <a:r>
+                <a:rPr sz="1844" b="0">
+                  <a:solidFill>
+                    <a:srgbClr val="C3D1E0"/>
+                  </a:solidFill>
+                </a:rPr>
+                <a:t>等效纯色 · #FFC852</a:t>
+              </a:r>
+            </a:p>
+          </p:txBody>
+        </p:sp>
+        <p:sp>
+          <p:nvSpPr>
+            <p:cNvPr id="5" name="Text color comparison"/>
+            <p:cNvSpPr txBox="1"/>
+            <p:nvPr/>
+          </p:nvSpPr>
+          <p:spPr>
+            <a:xfrm>
+              <a:off x="468489" y="2061351"/>
+              <a:ext cx="7495822" cy="843280"/>
+            </a:xfrm>
+            <a:noFill/>
+          </p:spPr>
+          <p:txBody>
+            <a:bodyPr lIns="0" rIns="0" tIns="0" bIns="0"/>
+            <a:lstStyle/>
+            <a:p>
+              <a:r>
+                <a:rPr sz="4796" b="1">
+                  <a:solidFill>
+                    <a:srgbClr val="FFC852"/>
+                  </a:solidFill>
+                </a:rPr>
+                <a:t>文字填色 Aa 123</a:t>
+              </a:r>
+            </a:p>
+          </p:txBody>
+        </p:sp>
+        <p:sp>
+          <p:nvSpPr>
+            <p:cNvPr id="6" name="Text color comparison"/>
+            <p:cNvSpPr txBox="1"/>
+            <p:nvPr/>
+          </p:nvSpPr>
+          <p:spPr>
+            <a:xfrm>
+              <a:off x="468489" y="3185724"/>
+              <a:ext cx="7495822" cy="843280"/>
+            </a:xfrm>
+            <a:noFill/>
+          </p:spPr>
+          <p:txBody>
+            <a:bodyPr lIns="0" rIns="0" tIns="0" bIns="0"/>
+            <a:lstStyle/>
+            <a:p>
+              <a:r>
+                <a:rPr sz="1844" b="0">
+                  <a:solidFill>
+                    <a:srgbClr val="C3D1E0"/>
+                  </a:solidFill>
+                </a:rPr>
+                <a:t>白色参照 · #FFFFFF</a:t>
+              </a:r>
+            </a:p>
+          </p:txBody>
+        </p:sp>
+        <p:sp>
+          <p:nvSpPr>
+            <p:cNvPr id="7" name="Text color comparison"/>
+            <p:cNvSpPr txBox="1"/>
+            <p:nvPr/>
+          </p:nvSpPr>
+          <p:spPr>
+            <a:xfrm>
+              <a:off x="468489" y="3537091"/>
+              <a:ext cx="7495822" cy="843280"/>
+            </a:xfrm>
+            <a:noFill/>
+          </p:spPr>
+          <p:txBody>
+            <a:bodyPr lIns="0" rIns="0" tIns="0" bIns="0"/>
+            <a:lstStyle/>
+            <a:p>
+              <a:r>
+                <a:rPr sz="4796" b="1">
+                  <a:solidFill>
+                    <a:srgbClr val="FFFFFF"/>
+                  </a:solidFill>
+                </a:rPr>
+                <a:t>文字填色 Aa 123</a:t>
               </a:r>
             </a:p>
           </p:txBody>
@@ -3254,7 +3519,7 @@
       </p:grpSp>
       <p:sp>
         <p:nvSpPr>
-          <p:cNvPr id="5" name="Showcase explanation"/>
+          <p:cNvPr id="10" name="Showcase explanation"/>
           <p:cNvSpPr txBox="1"/>
           <p:nvPr/>
         </p:nvSpPr>
@@ -3286,14 +3551,14 @@
                   <a:srgbClr val="FFFFFF"/>
                 </a:solidFill>
               </a:rPr>
-              <a:t>文字填色 · 渐变输入</a:t>
+              <a:t>文字填色 · 渐变与纯色对照</a:t>
             </a:r>
           </a:p>
         </p:txBody>
       </p:sp>
       <p:sp>
         <p:nvSpPr>
-          <p:cNvPr id="6" name="Showcase explanation"/>
+          <p:cNvPr id="11" name="Showcase explanation"/>
           <p:cNvSpPr txBox="1"/>
           <p:nvPr/>
         </p:nvSpPr>
@@ -3343,9 +3608,9 @@
                   <a:srgbClr val="102238"/>
                 </a:solidFill>
               </a:rPr>
-              <a:t>文字声明金色渐变
-一个色标来自主题色
-并叠加亮度变换</a:t>
+              <a:t>上：金色渐变输入
+中：等效亮金色纯色
+下：白色文字参照</a:t>
             </a:r>
           </a:p>
           <a:p>
@@ -3381,16 +3646,17 @@
                   <a:srgbClr val="102238"/>
                 </a:solidFill>
               </a:rPr>
-              <a:t>当前使用浅金色代表色
-未逐像素绘制文字渐变
-应接近下一页纯色参照</a:t>
+              <a:t>上、中两行颜色一致
+与下方白字明显区分
+渐变按中点纯色显示
+暂不呈现字内渐变</a:t>
             </a:r>
           </a:p>
         </p:txBody>
       </p:sp>
       <p:sp>
         <p:nvSpPr>
-          <p:cNvPr id="7" name="Example boundary"/>
+          <p:cNvPr id="12" name="Example boundary"/>
           <p:cNvSpPr/>
           <p:nvPr/>
         </p:nvSpPr>

--- a/demo/src/main/assets/samples/sample.pptx
+++ b/demo/src/main/assets/samples/sample.pptx
@@ -9,6 +9,7 @@
     <p:sldMasterId id="2147483652" r:id="rMaster4"/>
     <p:sldMasterId id="2147483653" r:id="rMaster5"/>
     <p:sldMasterId id="2147483654" r:id="rMaster6"/>
+    <p:sldMasterId id="2147483655" r:id="rMaster7"/>
   </p:sldMasterIdLst>
   <p:sldIdLst>
     <p:sldId id="256" r:id="rSlide0"/>
@@ -27,6 +28,8 @@
     <p:sldId id="269" r:id="rSlide13"/>
     <p:sldId id="270" r:id="rSlide14"/>
     <p:sldId id="271" r:id="rSlide15"/>
+    <p:sldId id="272" r:id="rSlide16"/>
+    <p:sldId id="273" r:id="rSlide17"/>
   </p:sldIdLst>
   <p:sldSz cx="12192000" cy="6858000" type="screen16x9"/>
   <p:notesSz cx="6858000" cy="9144000"/>
@@ -4427,6 +4430,2153 @@
 </a:theme>
 </file>
 
+<file path=ppt/showcase/compatibility/slideLayouts/slideLayout1.xml><?xml version="1.0" encoding="utf-8"?>
+<p:sldLayout xmlns:p="http://schemas.openxmlformats.org/presentationml/2006/main" xmlns:a="http://schemas.openxmlformats.org/drawingml/2006/main" type="blank" preserve="1">
+  <p:cSld name="Blank">
+    <p:spTree>
+      <p:nvGrpSpPr>
+        <p:cNvPr id="2" name="Showcase canvas"/>
+        <p:cNvGrpSpPr/>
+        <p:nvPr/>
+      </p:nvGrpSpPr>
+      <p:grpSpPr/>
+      <p:grpSp>
+        <p:nvGrpSpPr>
+          <p:cNvPr id="3" name="Source slide, centered"/>
+          <p:cNvGrpSpPr/>
+          <p:nvPr/>
+        </p:nvGrpSpPr>
+        <p:grpSpPr>
+          <a:xfrm>
+            <a:off x="0" y="0"/>
+            <a:ext cx="12192000" cy="6858000"/>
+            <a:chOff x="0" y="0"/>
+            <a:chExt cx="12192000" cy="6858000"/>
+          </a:xfrm>
+        </p:grpSpPr>
+      </p:grpSp>
+    </p:spTree>
+  </p:cSld>
+  <p:clrMapOvr>
+    <a:masterClrMapping/>
+  </p:clrMapOvr>
+</p:sldLayout>
+</file>
+
+<file path=ppt/showcase/compatibility/slideMasters/slideMaster1.xml><?xml version="1.0" encoding="utf-8"?>
+<p:sldMaster xmlns:p="http://schemas.openxmlformats.org/presentationml/2006/main" xmlns:a="http://schemas.openxmlformats.org/drawingml/2006/main" xmlns:r="http://schemas.openxmlformats.org/officeDocument/2006/relationships">
+  <p:cSld name="Fixture master">
+    <p:spTree>
+      <p:nvGrpSpPr>
+        <p:cNvPr id="2" name="Showcase canvas"/>
+        <p:cNvGrpSpPr/>
+        <p:nvPr/>
+      </p:nvGrpSpPr>
+      <p:grpSpPr/>
+      <p:grpSp>
+        <p:nvGrpSpPr>
+          <p:cNvPr id="3" name="Source slide, centered"/>
+          <p:cNvGrpSpPr/>
+          <p:nvPr/>
+        </p:nvGrpSpPr>
+        <p:grpSpPr>
+          <a:xfrm>
+            <a:off x="0" y="0"/>
+            <a:ext cx="12192000" cy="6858000"/>
+            <a:chOff x="0" y="0"/>
+            <a:chExt cx="12192000" cy="6858000"/>
+          </a:xfrm>
+        </p:grpSpPr>
+      </p:grpSp>
+    </p:spTree>
+  </p:cSld>
+  <p:clrMap accent1="accent1" accent2="accent2" accent3="accent3" accent4="accent4" accent5="accent5" accent6="accent6" bg1="lt1" bg2="lt2" tx1="dk1" tx2="dk2" hlink="hlink" folHlink="folHlink"/>
+  <p:sldLayoutIdLst>
+    <p:sldLayoutId id="2147483655" r:id="rLayout"/>
+  </p:sldLayoutIdLst>
+  <p:txStyles>
+    <p:titleStyle/>
+    <p:bodyStyle/>
+    <p:otherStyle>
+      <a:lvl1pPr>
+        <a:defRPr sz="1800">
+          <a:solidFill>
+            <a:srgbClr val="202124"/>
+          </a:solidFill>
+        </a:defRPr>
+      </a:lvl1pPr>
+    </p:otherStyle>
+  </p:txStyles>
+</p:sldMaster>
+</file>
+
+<file path=ppt/showcase/compatibility/slides/slide1.xml><?xml version="1.0" encoding="utf-8"?>
+<p:sld xmlns:p="http://schemas.openxmlformats.org/presentationml/2006/main" xmlns:a="http://schemas.openxmlformats.org/drawingml/2006/main">
+  <p:cSld>
+    <p:bg>
+      <p:bgPr>
+        <a:solidFill>
+          <a:srgbClr val="102238"/>
+        </a:solidFill>
+      </p:bgPr>
+    </p:bg>
+    <p:spTree>
+      <p:nvGrpSpPr>
+        <p:cNvPr id="28" name="Showcase canvas"/>
+        <p:cNvGrpSpPr/>
+        <p:nvPr/>
+      </p:nvGrpSpPr>
+      <p:grpSpPr/>
+      <p:grpSp>
+        <p:nvGrpSpPr>
+          <p:cNvPr id="29" name="Source slide, centered"/>
+          <p:cNvGrpSpPr/>
+          <p:nvPr/>
+        </p:nvGrpSpPr>
+        <p:grpSpPr>
+          <a:xfrm>
+            <a:off x="0" y="0"/>
+            <a:ext cx="12192000" cy="6858000"/>
+            <a:chOff x="0" y="0"/>
+            <a:chExt cx="12192000" cy="6858000"/>
+          </a:xfrm>
+        </p:grpSpPr>
+        <p:sp>
+          <p:nvSpPr>
+            <p:cNvPr id="2" name="Compatibility explanation"/>
+            <p:cNvSpPr txBox="1"/>
+            <p:nvPr/>
+          </p:nvSpPr>
+          <p:spPr>
+            <a:xfrm>
+              <a:off x="508000" y="355600"/>
+              <a:ext cx="11176000" cy="609600"/>
+            </a:xfrm>
+            <a:noFill/>
+          </p:spPr>
+          <p:txBody>
+            <a:bodyPr wrap="none" lIns="0" rIns="0" tIns="0" bIns="0"/>
+            <a:lstStyle/>
+            <a:p>
+              <a:r>
+                <a:rPr sz="3200">
+                  <a:solidFill>
+                    <a:srgbClr val="DCE7F3"/>
+                  </a:solidFill>
+                </a:rPr>
+                <a:t>预设图形 · 三角形与菱形</a:t>
+              </a:r>
+            </a:p>
+          </p:txBody>
+        </p:sp>
+        <p:sp>
+          <p:nvSpPr>
+            <p:cNvPr id="3" name="Compatibility explanation"/>
+            <p:cNvSpPr txBox="1"/>
+            <p:nvPr/>
+          </p:nvSpPr>
+          <p:spPr>
+            <a:xfrm>
+              <a:off x="508000" y="1092200"/>
+              <a:ext cx="11176000" cy="330200"/>
+            </a:xfrm>
+            <a:noFill/>
+          </p:spPr>
+          <p:txBody>
+            <a:bodyPr wrap="none" lIns="0" rIns="0" tIns="0" bIns="0"/>
+            <a:lstStyle/>
+            <a:p>
+              <a:r>
+                <a:rPr sz="1700">
+                  <a:solidFill>
+                    <a:srgbClr val="DCE7F3"/>
+                  </a:solidFill>
+                </a:rPr>
+                <a:t>上排为默认轮廓，下排为顶点调整、水平翻转和旋转。填色与描边应保持完整。</a:t>
+              </a:r>
+            </a:p>
+          </p:txBody>
+        </p:sp>
+        <p:sp>
+          <p:nvSpPr>
+            <p:cNvPr id="10" name="Compatibility explanation"/>
+            <p:cNvSpPr txBox="1"/>
+            <p:nvPr/>
+          </p:nvSpPr>
+          <p:spPr>
+            <a:xfrm>
+              <a:off x="508000" y="1600200"/>
+              <a:ext cx="3606800" cy="330200"/>
+            </a:xfrm>
+            <a:noFill/>
+          </p:spPr>
+          <p:txBody>
+            <a:bodyPr wrap="none" lIns="0" rIns="0" tIns="0" bIns="0"/>
+            <a:lstStyle/>
+            <a:p>
+              <a:r>
+                <a:rPr sz="1800">
+                  <a:solidFill>
+                    <a:srgbClr val="DCE7F3"/>
+                  </a:solidFill>
+                </a:rPr>
+                <a:t>三角形</a:t>
+              </a:r>
+            </a:p>
+          </p:txBody>
+        </p:sp>
+        <p:sp>
+          <p:nvSpPr>
+            <p:cNvPr id="11" name="三角形"/>
+            <p:cNvSpPr/>
+            <p:nvPr/>
+          </p:nvSpPr>
+          <p:spPr>
+            <a:xfrm>
+              <a:off x="1422400" y="2133600"/>
+              <a:ext cx="1625600" cy="1270000"/>
+            </a:xfrm>
+            <a:prstGeom prst="triangle">
+              <a:avLst/>
+            </a:prstGeom>
+            <a:solidFill>
+              <a:srgbClr val="45CFC0"/>
+            </a:solidFill>
+            <a:ln w="25400">
+              <a:solidFill>
+                <a:srgbClr val="FFFFFF"/>
+              </a:solidFill>
+            </a:ln>
+          </p:spPr>
+        </p:sp>
+        <p:sp>
+          <p:nvSpPr>
+            <p:cNvPr id="12" name="Compatibility explanation"/>
+            <p:cNvSpPr txBox="1"/>
+            <p:nvPr/>
+          </p:nvSpPr>
+          <p:spPr>
+            <a:xfrm>
+              <a:off x="508000" y="3505200"/>
+              <a:ext cx="3606800" cy="304800"/>
+            </a:xfrm>
+            <a:noFill/>
+          </p:spPr>
+          <p:txBody>
+            <a:bodyPr wrap="none" lIns="0" rIns="0" tIns="0" bIns="0"/>
+            <a:lstStyle/>
+            <a:p>
+              <a:r>
+                <a:rPr sz="1600">
+                  <a:solidFill>
+                    <a:srgbClr val="DCE7F3"/>
+                  </a:solidFill>
+                </a:rPr>
+                <a:t>顶点位于上边中点</a:t>
+              </a:r>
+            </a:p>
+          </p:txBody>
+        </p:sp>
+        <p:sp>
+          <p:nvSpPr>
+            <p:cNvPr id="13" name="Compatibility explanation"/>
+            <p:cNvSpPr txBox="1"/>
+            <p:nvPr/>
+          </p:nvSpPr>
+          <p:spPr>
+            <a:xfrm>
+              <a:off x="4292600" y="1600200"/>
+              <a:ext cx="3606800" cy="330200"/>
+            </a:xfrm>
+            <a:noFill/>
+          </p:spPr>
+          <p:txBody>
+            <a:bodyPr wrap="none" lIns="0" rIns="0" tIns="0" bIns="0"/>
+            <a:lstStyle/>
+            <a:p>
+              <a:r>
+                <a:rPr sz="1800">
+                  <a:solidFill>
+                    <a:srgbClr val="DCE7F3"/>
+                  </a:solidFill>
+                </a:rPr>
+                <a:t>直角三角形</a:t>
+              </a:r>
+            </a:p>
+          </p:txBody>
+        </p:sp>
+        <p:sp>
+          <p:nvSpPr>
+            <p:cNvPr id="14" name="直角三角形"/>
+            <p:cNvSpPr/>
+            <p:nvPr/>
+          </p:nvSpPr>
+          <p:spPr>
+            <a:xfrm>
+              <a:off x="5207000" y="2133600"/>
+              <a:ext cx="1625600" cy="1270000"/>
+            </a:xfrm>
+            <a:prstGeom prst="rtTriangle">
+              <a:avLst/>
+            </a:prstGeom>
+            <a:solidFill>
+              <a:srgbClr val="E9C46A"/>
+            </a:solidFill>
+            <a:ln w="25400">
+              <a:solidFill>
+                <a:srgbClr val="FFFFFF"/>
+              </a:solidFill>
+            </a:ln>
+          </p:spPr>
+        </p:sp>
+        <p:sp>
+          <p:nvSpPr>
+            <p:cNvPr id="15" name="Compatibility explanation"/>
+            <p:cNvSpPr txBox="1"/>
+            <p:nvPr/>
+          </p:nvSpPr>
+          <p:spPr>
+            <a:xfrm>
+              <a:off x="4292600" y="3505200"/>
+              <a:ext cx="3606800" cy="304800"/>
+            </a:xfrm>
+            <a:noFill/>
+          </p:spPr>
+          <p:txBody>
+            <a:bodyPr wrap="none" lIns="0" rIns="0" tIns="0" bIns="0"/>
+            <a:lstStyle/>
+            <a:p>
+              <a:r>
+                <a:rPr sz="1600">
+                  <a:solidFill>
+                    <a:srgbClr val="DCE7F3"/>
+                  </a:solidFill>
+                </a:rPr>
+                <a:t>直角位于左下方</a:t>
+              </a:r>
+            </a:p>
+          </p:txBody>
+        </p:sp>
+        <p:sp>
+          <p:nvSpPr>
+            <p:cNvPr id="16" name="Compatibility explanation"/>
+            <p:cNvSpPr txBox="1"/>
+            <p:nvPr/>
+          </p:nvSpPr>
+          <p:spPr>
+            <a:xfrm>
+              <a:off x="8077200" y="1600200"/>
+              <a:ext cx="3606800" cy="330200"/>
+            </a:xfrm>
+            <a:noFill/>
+          </p:spPr>
+          <p:txBody>
+            <a:bodyPr wrap="none" lIns="0" rIns="0" tIns="0" bIns="0"/>
+            <a:lstStyle/>
+            <a:p>
+              <a:r>
+                <a:rPr sz="1800">
+                  <a:solidFill>
+                    <a:srgbClr val="DCE7F3"/>
+                  </a:solidFill>
+                </a:rPr>
+                <a:t>菱形</a:t>
+              </a:r>
+            </a:p>
+          </p:txBody>
+        </p:sp>
+        <p:sp>
+          <p:nvSpPr>
+            <p:cNvPr id="17" name="菱形"/>
+            <p:cNvSpPr/>
+            <p:nvPr/>
+          </p:nvSpPr>
+          <p:spPr>
+            <a:xfrm>
+              <a:off x="8991600" y="2133600"/>
+              <a:ext cx="1625600" cy="1270000"/>
+            </a:xfrm>
+            <a:prstGeom prst="diamond">
+              <a:avLst/>
+            </a:prstGeom>
+            <a:solidFill>
+              <a:srgbClr val="8CB9ED"/>
+            </a:solidFill>
+            <a:ln w="25400">
+              <a:solidFill>
+                <a:srgbClr val="FFFFFF"/>
+              </a:solidFill>
+            </a:ln>
+          </p:spPr>
+        </p:sp>
+        <p:sp>
+          <p:nvSpPr>
+            <p:cNvPr id="18" name="Compatibility explanation"/>
+            <p:cNvSpPr txBox="1"/>
+            <p:nvPr/>
+          </p:nvSpPr>
+          <p:spPr>
+            <a:xfrm>
+              <a:off x="8077200" y="3505200"/>
+              <a:ext cx="3606800" cy="304800"/>
+            </a:xfrm>
+            <a:noFill/>
+          </p:spPr>
+          <p:txBody>
+            <a:bodyPr wrap="none" lIns="0" rIns="0" tIns="0" bIns="0"/>
+            <a:lstStyle/>
+            <a:p>
+              <a:r>
+                <a:rPr sz="1600">
+                  <a:solidFill>
+                    <a:srgbClr val="DCE7F3"/>
+                  </a:solidFill>
+                </a:rPr>
+                <a:t>四个顶点位于边中点</a:t>
+              </a:r>
+            </a:p>
+          </p:txBody>
+        </p:sp>
+        <p:sp>
+          <p:nvSpPr>
+            <p:cNvPr id="19" name="Compatibility explanation"/>
+            <p:cNvSpPr txBox="1"/>
+            <p:nvPr/>
+          </p:nvSpPr>
+          <p:spPr>
+            <a:xfrm>
+              <a:off x="508000" y="3962400"/>
+              <a:ext cx="3606800" cy="330200"/>
+            </a:xfrm>
+            <a:noFill/>
+          </p:spPr>
+          <p:txBody>
+            <a:bodyPr wrap="none" lIns="0" rIns="0" tIns="0" bIns="0"/>
+            <a:lstStyle/>
+            <a:p>
+              <a:r>
+                <a:rPr sz="1800">
+                  <a:solidFill>
+                    <a:srgbClr val="DCE7F3"/>
+                  </a:solidFill>
+                </a:rPr>
+                <a:t>三角形 · 顶点调整</a:t>
+              </a:r>
+            </a:p>
+          </p:txBody>
+        </p:sp>
+        <p:sp>
+          <p:nvSpPr>
+            <p:cNvPr id="20" name="三角形 · 顶点调整"/>
+            <p:cNvSpPr/>
+            <p:nvPr/>
+          </p:nvSpPr>
+          <p:spPr>
+            <a:xfrm>
+              <a:off x="1422400" y="4495800"/>
+              <a:ext cx="1625600" cy="1270000"/>
+            </a:xfrm>
+            <a:prstGeom prst="triangle">
+              <a:avLst>
+                <a:gd name="adj" fmla="val 25000"/>
+              </a:avLst>
+            </a:prstGeom>
+            <a:solidFill>
+              <a:srgbClr val="45CFC0"/>
+            </a:solidFill>
+            <a:ln w="25400">
+              <a:solidFill>
+                <a:srgbClr val="FFFFFF"/>
+              </a:solidFill>
+            </a:ln>
+          </p:spPr>
+        </p:sp>
+        <p:sp>
+          <p:nvSpPr>
+            <p:cNvPr id="21" name="Compatibility explanation"/>
+            <p:cNvSpPr txBox="1"/>
+            <p:nvPr/>
+          </p:nvSpPr>
+          <p:spPr>
+            <a:xfrm>
+              <a:off x="508000" y="6070600"/>
+              <a:ext cx="3606800" cy="304800"/>
+            </a:xfrm>
+            <a:noFill/>
+          </p:spPr>
+          <p:txBody>
+            <a:bodyPr wrap="none" lIns="0" rIns="0" tIns="0" bIns="0"/>
+            <a:lstStyle/>
+            <a:p>
+              <a:r>
+                <a:rPr sz="1600">
+                  <a:solidFill>
+                    <a:srgbClr val="DCE7F3"/>
+                  </a:solidFill>
+                </a:rPr>
+                <a:t>顶点位于宽度的 25% 处</a:t>
+              </a:r>
+            </a:p>
+          </p:txBody>
+        </p:sp>
+        <p:sp>
+          <p:nvSpPr>
+            <p:cNvPr id="22" name="Compatibility explanation"/>
+            <p:cNvSpPr txBox="1"/>
+            <p:nvPr/>
+          </p:nvSpPr>
+          <p:spPr>
+            <a:xfrm>
+              <a:off x="4292600" y="3962400"/>
+              <a:ext cx="3606800" cy="330200"/>
+            </a:xfrm>
+            <a:noFill/>
+          </p:spPr>
+          <p:txBody>
+            <a:bodyPr wrap="none" lIns="0" rIns="0" tIns="0" bIns="0"/>
+            <a:lstStyle/>
+            <a:p>
+              <a:r>
+                <a:rPr sz="1800">
+                  <a:solidFill>
+                    <a:srgbClr val="DCE7F3"/>
+                  </a:solidFill>
+                </a:rPr>
+                <a:t>直角三角形 · 水平翻转</a:t>
+              </a:r>
+            </a:p>
+          </p:txBody>
+        </p:sp>
+        <p:sp>
+          <p:nvSpPr>
+            <p:cNvPr id="23" name="直角三角形 · 水平翻转"/>
+            <p:cNvSpPr/>
+            <p:nvPr/>
+          </p:nvSpPr>
+          <p:spPr>
+            <a:xfrm flipH="1">
+              <a:off x="5207000" y="4495800"/>
+              <a:ext cx="1625600" cy="1270000"/>
+            </a:xfrm>
+            <a:prstGeom prst="rtTriangle">
+              <a:avLst/>
+            </a:prstGeom>
+            <a:solidFill>
+              <a:srgbClr val="E9C46A"/>
+            </a:solidFill>
+            <a:ln w="25400">
+              <a:solidFill>
+                <a:srgbClr val="FFFFFF"/>
+              </a:solidFill>
+            </a:ln>
+          </p:spPr>
+        </p:sp>
+        <p:sp>
+          <p:nvSpPr>
+            <p:cNvPr id="24" name="Compatibility explanation"/>
+            <p:cNvSpPr txBox="1"/>
+            <p:nvPr/>
+          </p:nvSpPr>
+          <p:spPr>
+            <a:xfrm>
+              <a:off x="4292600" y="6070600"/>
+              <a:ext cx="3606800" cy="304800"/>
+            </a:xfrm>
+            <a:noFill/>
+          </p:spPr>
+          <p:txBody>
+            <a:bodyPr wrap="none" lIns="0" rIns="0" tIns="0" bIns="0"/>
+            <a:lstStyle/>
+            <a:p>
+              <a:r>
+                <a:rPr sz="1600">
+                  <a:solidFill>
+                    <a:srgbClr val="DCE7F3"/>
+                  </a:solidFill>
+                </a:rPr>
+                <a:t>直角移至右下方</a:t>
+              </a:r>
+            </a:p>
+          </p:txBody>
+        </p:sp>
+        <p:sp>
+          <p:nvSpPr>
+            <p:cNvPr id="25" name="Compatibility explanation"/>
+            <p:cNvSpPr txBox="1"/>
+            <p:nvPr/>
+          </p:nvSpPr>
+          <p:spPr>
+            <a:xfrm>
+              <a:off x="8077200" y="3962400"/>
+              <a:ext cx="3606800" cy="330200"/>
+            </a:xfrm>
+            <a:noFill/>
+          </p:spPr>
+          <p:txBody>
+            <a:bodyPr wrap="none" lIns="0" rIns="0" tIns="0" bIns="0"/>
+            <a:lstStyle/>
+            <a:p>
+              <a:r>
+                <a:rPr sz="1800">
+                  <a:solidFill>
+                    <a:srgbClr val="DCE7F3"/>
+                  </a:solidFill>
+                </a:rPr>
+                <a:t>直角三角形 · 旋转 90°</a:t>
+              </a:r>
+            </a:p>
+          </p:txBody>
+        </p:sp>
+        <p:sp>
+          <p:nvSpPr>
+            <p:cNvPr id="26" name="直角三角形 · 旋转 90°"/>
+            <p:cNvSpPr/>
+            <p:nvPr/>
+          </p:nvSpPr>
+          <p:spPr>
+            <a:xfrm rot="5400000">
+              <a:off x="8991600" y="4495800"/>
+              <a:ext cx="1625600" cy="1270000"/>
+            </a:xfrm>
+            <a:prstGeom prst="rtTriangle">
+              <a:avLst/>
+            </a:prstGeom>
+            <a:solidFill>
+              <a:srgbClr val="8CB9ED"/>
+            </a:solidFill>
+            <a:ln w="25400">
+              <a:solidFill>
+                <a:srgbClr val="FFFFFF"/>
+              </a:solidFill>
+            </a:ln>
+          </p:spPr>
+        </p:sp>
+        <p:sp>
+          <p:nvSpPr>
+            <p:cNvPr id="27" name="Compatibility explanation"/>
+            <p:cNvSpPr txBox="1"/>
+            <p:nvPr/>
+          </p:nvSpPr>
+          <p:spPr>
+            <a:xfrm>
+              <a:off x="8077200" y="6070600"/>
+              <a:ext cx="3606800" cy="304800"/>
+            </a:xfrm>
+            <a:noFill/>
+          </p:spPr>
+          <p:txBody>
+            <a:bodyPr wrap="none" lIns="0" rIns="0" tIns="0" bIns="0"/>
+            <a:lstStyle/>
+            <a:p>
+              <a:r>
+                <a:rPr sz="1600">
+                  <a:solidFill>
+                    <a:srgbClr val="DCE7F3"/>
+                  </a:solidFill>
+                </a:rPr>
+                <a:t>顺时针旋转，直角移至左上方</a:t>
+              </a:r>
+            </a:p>
+          </p:txBody>
+        </p:sp>
+      </p:grpSp>
+    </p:spTree>
+  </p:cSld>
+</p:sld>
+</file>
+
+<file path=ppt/showcase/compatibility/slides/slide2.xml><?xml version="1.0" encoding="utf-8"?>
+<p:sld xmlns:p="http://schemas.openxmlformats.org/presentationml/2006/main" xmlns:a="http://schemas.openxmlformats.org/drawingml/2006/main">
+  <p:cSld>
+    <p:bg>
+      <p:bgPr>
+        <a:solidFill>
+          <a:srgbClr val="F4F7FA"/>
+        </a:solidFill>
+      </p:bgPr>
+    </p:bg>
+    <p:spTree>
+      <p:nvGrpSpPr>
+        <p:cNvPr id="42" name="Showcase canvas"/>
+        <p:cNvGrpSpPr/>
+        <p:nvPr/>
+      </p:nvGrpSpPr>
+      <p:grpSpPr/>
+      <p:grpSp>
+        <p:nvGrpSpPr>
+          <p:cNvPr id="43" name="Source slide, centered"/>
+          <p:cNvGrpSpPr/>
+          <p:nvPr/>
+        </p:nvGrpSpPr>
+        <p:grpSpPr>
+          <a:xfrm>
+            <a:off x="0" y="0"/>
+            <a:ext cx="12192000" cy="6858000"/>
+            <a:chOff x="0" y="0"/>
+            <a:chExt cx="12192000" cy="6858000"/>
+          </a:xfrm>
+        </p:grpSpPr>
+        <p:sp>
+          <p:nvSpPr>
+            <p:cNvPr id="2" name="Compatibility explanation"/>
+            <p:cNvSpPr txBox="1"/>
+            <p:nvPr/>
+          </p:nvSpPr>
+          <p:spPr>
+            <a:xfrm>
+              <a:off x="508000" y="355600"/>
+              <a:ext cx="11176000" cy="609600"/>
+            </a:xfrm>
+            <a:noFill/>
+          </p:spPr>
+          <p:txBody>
+            <a:bodyPr wrap="none" lIns="0" rIns="0" tIns="0" bIns="0"/>
+            <a:lstStyle/>
+            <a:p>
+              <a:r>
+                <a:rPr sz="3200">
+                  <a:solidFill>
+                    <a:srgbClr val="102238"/>
+                  </a:solidFill>
+                </a:rPr>
+                <a:t>自动编号 · 16 种常见格式</a:t>
+              </a:r>
+            </a:p>
+          </p:txBody>
+        </p:sp>
+        <p:sp>
+          <p:nvSpPr>
+            <p:cNvPr id="3" name="Compatibility explanation"/>
+            <p:cNvSpPr txBox="1"/>
+            <p:nvPr/>
+          </p:nvSpPr>
+          <p:spPr>
+            <a:xfrm>
+              <a:off x="508000" y="1092200"/>
+              <a:ext cx="11176000" cy="330200"/>
+            </a:xfrm>
+            <a:noFill/>
+          </p:spPr>
+          <p:txBody>
+            <a:bodyPr wrap="none" lIns="0" rIns="0" tIns="0" bIns="0"/>
+            <a:lstStyle/>
+            <a:p>
+              <a:r>
+                <a:rPr sz="1700">
+                  <a:solidFill>
+                    <a:srgbClr val="102238"/>
+                  </a:solidFill>
+                </a:rPr>
+                <a:t>每组从第 4 项开始，下一项应自动递增为 5。核对数字、字母、罗马数字及括号。</a:t>
+              </a:r>
+            </a:p>
+          </p:txBody>
+        </p:sp>
+        <p:sp>
+          <p:nvSpPr>
+            <p:cNvPr id="10" name="Compatibility explanation"/>
+            <p:cNvSpPr txBox="1"/>
+            <p:nvPr/>
+          </p:nvSpPr>
+          <p:spPr>
+            <a:xfrm>
+              <a:off x="508000" y="1600200"/>
+              <a:ext cx="2641600" cy="304800"/>
+            </a:xfrm>
+            <a:noFill/>
+          </p:spPr>
+          <p:txBody>
+            <a:bodyPr wrap="none" lIns="0" rIns="0" tIns="0" bIns="0"/>
+            <a:lstStyle/>
+            <a:p>
+              <a:r>
+                <a:rPr sz="1600">
+                  <a:solidFill>
+                    <a:srgbClr val="24745C"/>
+                  </a:solidFill>
+                </a:rPr>
+                <a:t>数字 · 句点</a:t>
+              </a:r>
+            </a:p>
+          </p:txBody>
+        </p:sp>
+        <p:sp>
+          <p:nvSpPr>
+            <p:cNvPr id="11" name="Compatibility explanation"/>
+            <p:cNvSpPr txBox="1"/>
+            <p:nvPr/>
+          </p:nvSpPr>
+          <p:spPr>
+            <a:xfrm>
+              <a:off x="508000" y="1930400"/>
+              <a:ext cx="2641600" cy="685800"/>
+            </a:xfrm>
+            <a:noFill/>
+          </p:spPr>
+          <p:txBody>
+            <a:bodyPr wrap="none" lIns="0" rIns="0" tIns="0" bIns="0"/>
+            <a:lstStyle/>
+            <a:p>
+              <a:pPr>
+                <a:lnSpc>
+                  <a:spcPts val="2300"/>
+                </a:lnSpc>
+                <a:buAutoNum type="arabicPeriod" startAt="4"/>
+              </a:pPr>
+              <a:r>
+                <a:rPr sz="1800">
+                  <a:solidFill>
+                    <a:srgbClr val="102238"/>
+                  </a:solidFill>
+                </a:rPr>
+                <a:t>步骤一</a:t>
+              </a:r>
+            </a:p>
+            <a:p>
+              <a:pPr>
+                <a:lnSpc>
+                  <a:spcPts val="2300"/>
+                </a:lnSpc>
+                <a:buAutoNum type="arabicPeriod"/>
+              </a:pPr>
+              <a:r>
+                <a:rPr sz="1800">
+                  <a:solidFill>
+                    <a:srgbClr val="102238"/>
+                  </a:solidFill>
+                </a:rPr>
+                <a:t>步骤二</a:t>
+              </a:r>
+            </a:p>
+          </p:txBody>
+        </p:sp>
+        <p:sp>
+          <p:nvSpPr>
+            <p:cNvPr id="12" name="Compatibility explanation"/>
+            <p:cNvSpPr txBox="1"/>
+            <p:nvPr/>
+          </p:nvSpPr>
+          <p:spPr>
+            <a:xfrm>
+              <a:off x="3352800" y="1600200"/>
+              <a:ext cx="2641600" cy="304800"/>
+            </a:xfrm>
+            <a:noFill/>
+          </p:spPr>
+          <p:txBody>
+            <a:bodyPr wrap="none" lIns="0" rIns="0" tIns="0" bIns="0"/>
+            <a:lstStyle/>
+            <a:p>
+              <a:r>
+                <a:rPr sz="1600">
+                  <a:solidFill>
+                    <a:srgbClr val="24745C"/>
+                  </a:solidFill>
+                </a:rPr>
+                <a:t>数字 · 右括号</a:t>
+              </a:r>
+            </a:p>
+          </p:txBody>
+        </p:sp>
+        <p:sp>
+          <p:nvSpPr>
+            <p:cNvPr id="13" name="Compatibility explanation"/>
+            <p:cNvSpPr txBox="1"/>
+            <p:nvPr/>
+          </p:nvSpPr>
+          <p:spPr>
+            <a:xfrm>
+              <a:off x="3352800" y="1930400"/>
+              <a:ext cx="2641600" cy="685800"/>
+            </a:xfrm>
+            <a:noFill/>
+          </p:spPr>
+          <p:txBody>
+            <a:bodyPr wrap="none" lIns="0" rIns="0" tIns="0" bIns="0"/>
+            <a:lstStyle/>
+            <a:p>
+              <a:pPr>
+                <a:lnSpc>
+                  <a:spcPts val="2300"/>
+                </a:lnSpc>
+                <a:buAutoNum type="arabicParenR" startAt="4"/>
+              </a:pPr>
+              <a:r>
+                <a:rPr sz="1800">
+                  <a:solidFill>
+                    <a:srgbClr val="102238"/>
+                  </a:solidFill>
+                </a:rPr>
+                <a:t>步骤一</a:t>
+              </a:r>
+            </a:p>
+            <a:p>
+              <a:pPr>
+                <a:lnSpc>
+                  <a:spcPts val="2300"/>
+                </a:lnSpc>
+                <a:buAutoNum type="arabicParenR"/>
+              </a:pPr>
+              <a:r>
+                <a:rPr sz="1800">
+                  <a:solidFill>
+                    <a:srgbClr val="102238"/>
+                  </a:solidFill>
+                </a:rPr>
+                <a:t>步骤二</a:t>
+              </a:r>
+            </a:p>
+          </p:txBody>
+        </p:sp>
+        <p:sp>
+          <p:nvSpPr>
+            <p:cNvPr id="14" name="Compatibility explanation"/>
+            <p:cNvSpPr txBox="1"/>
+            <p:nvPr/>
+          </p:nvSpPr>
+          <p:spPr>
+            <a:xfrm>
+              <a:off x="6197600" y="1600200"/>
+              <a:ext cx="2641600" cy="304800"/>
+            </a:xfrm>
+            <a:noFill/>
+          </p:spPr>
+          <p:txBody>
+            <a:bodyPr wrap="none" lIns="0" rIns="0" tIns="0" bIns="0"/>
+            <a:lstStyle/>
+            <a:p>
+              <a:r>
+                <a:rPr sz="1600">
+                  <a:solidFill>
+                    <a:srgbClr val="24745C"/>
+                  </a:solidFill>
+                </a:rPr>
+                <a:t>数字 · 双括号</a:t>
+              </a:r>
+            </a:p>
+          </p:txBody>
+        </p:sp>
+        <p:sp>
+          <p:nvSpPr>
+            <p:cNvPr id="15" name="Compatibility explanation"/>
+            <p:cNvSpPr txBox="1"/>
+            <p:nvPr/>
+          </p:nvSpPr>
+          <p:spPr>
+            <a:xfrm>
+              <a:off x="6197600" y="1930400"/>
+              <a:ext cx="2641600" cy="685800"/>
+            </a:xfrm>
+            <a:noFill/>
+          </p:spPr>
+          <p:txBody>
+            <a:bodyPr wrap="none" lIns="0" rIns="0" tIns="0" bIns="0"/>
+            <a:lstStyle/>
+            <a:p>
+              <a:pPr>
+                <a:lnSpc>
+                  <a:spcPts val="2300"/>
+                </a:lnSpc>
+                <a:buAutoNum type="arabicParenBoth" startAt="4"/>
+              </a:pPr>
+              <a:r>
+                <a:rPr sz="1800">
+                  <a:solidFill>
+                    <a:srgbClr val="102238"/>
+                  </a:solidFill>
+                </a:rPr>
+                <a:t>步骤一</a:t>
+              </a:r>
+            </a:p>
+            <a:p>
+              <a:pPr>
+                <a:lnSpc>
+                  <a:spcPts val="2300"/>
+                </a:lnSpc>
+                <a:buAutoNum type="arabicParenBoth"/>
+              </a:pPr>
+              <a:r>
+                <a:rPr sz="1800">
+                  <a:solidFill>
+                    <a:srgbClr val="102238"/>
+                  </a:solidFill>
+                </a:rPr>
+                <a:t>步骤二</a:t>
+              </a:r>
+            </a:p>
+          </p:txBody>
+        </p:sp>
+        <p:sp>
+          <p:nvSpPr>
+            <p:cNvPr id="16" name="Compatibility explanation"/>
+            <p:cNvSpPr txBox="1"/>
+            <p:nvPr/>
+          </p:nvSpPr>
+          <p:spPr>
+            <a:xfrm>
+              <a:off x="9042400" y="1600200"/>
+              <a:ext cx="2641600" cy="304800"/>
+            </a:xfrm>
+            <a:noFill/>
+          </p:spPr>
+          <p:txBody>
+            <a:bodyPr wrap="none" lIns="0" rIns="0" tIns="0" bIns="0"/>
+            <a:lstStyle/>
+            <a:p>
+              <a:r>
+                <a:rPr sz="1600">
+                  <a:solidFill>
+                    <a:srgbClr val="24745C"/>
+                  </a:solidFill>
+                </a:rPr>
+                <a:t>数字 · 无标点</a:t>
+              </a:r>
+            </a:p>
+          </p:txBody>
+        </p:sp>
+        <p:sp>
+          <p:nvSpPr>
+            <p:cNvPr id="17" name="Compatibility explanation"/>
+            <p:cNvSpPr txBox="1"/>
+            <p:nvPr/>
+          </p:nvSpPr>
+          <p:spPr>
+            <a:xfrm>
+              <a:off x="9042400" y="1930400"/>
+              <a:ext cx="2641600" cy="685800"/>
+            </a:xfrm>
+            <a:noFill/>
+          </p:spPr>
+          <p:txBody>
+            <a:bodyPr wrap="none" lIns="0" rIns="0" tIns="0" bIns="0"/>
+            <a:lstStyle/>
+            <a:p>
+              <a:pPr>
+                <a:lnSpc>
+                  <a:spcPts val="2300"/>
+                </a:lnSpc>
+                <a:buAutoNum type="arabicPlain" startAt="4"/>
+              </a:pPr>
+              <a:r>
+                <a:rPr sz="1800">
+                  <a:solidFill>
+                    <a:srgbClr val="102238"/>
+                  </a:solidFill>
+                </a:rPr>
+                <a:t>步骤一</a:t>
+              </a:r>
+            </a:p>
+            <a:p>
+              <a:pPr>
+                <a:lnSpc>
+                  <a:spcPts val="2300"/>
+                </a:lnSpc>
+                <a:buAutoNum type="arabicPlain"/>
+              </a:pPr>
+              <a:r>
+                <a:rPr sz="1800">
+                  <a:solidFill>
+                    <a:srgbClr val="102238"/>
+                  </a:solidFill>
+                </a:rPr>
+                <a:t>步骤二</a:t>
+              </a:r>
+            </a:p>
+          </p:txBody>
+        </p:sp>
+        <p:sp>
+          <p:nvSpPr>
+            <p:cNvPr id="18" name="Compatibility explanation"/>
+            <p:cNvSpPr txBox="1"/>
+            <p:nvPr/>
+          </p:nvSpPr>
+          <p:spPr>
+            <a:xfrm>
+              <a:off x="508000" y="2743200"/>
+              <a:ext cx="2641600" cy="304800"/>
+            </a:xfrm>
+            <a:noFill/>
+          </p:spPr>
+          <p:txBody>
+            <a:bodyPr wrap="none" lIns="0" rIns="0" tIns="0" bIns="0"/>
+            <a:lstStyle/>
+            <a:p>
+              <a:r>
+                <a:rPr sz="1600">
+                  <a:solidFill>
+                    <a:srgbClr val="24745C"/>
+                  </a:solidFill>
+                </a:rPr>
+                <a:t>小写字母 · 句点</a:t>
+              </a:r>
+            </a:p>
+          </p:txBody>
+        </p:sp>
+        <p:sp>
+          <p:nvSpPr>
+            <p:cNvPr id="19" name="Compatibility explanation"/>
+            <p:cNvSpPr txBox="1"/>
+            <p:nvPr/>
+          </p:nvSpPr>
+          <p:spPr>
+            <a:xfrm>
+              <a:off x="508000" y="3073400"/>
+              <a:ext cx="2641600" cy="685800"/>
+            </a:xfrm>
+            <a:noFill/>
+          </p:spPr>
+          <p:txBody>
+            <a:bodyPr wrap="none" lIns="0" rIns="0" tIns="0" bIns="0"/>
+            <a:lstStyle/>
+            <a:p>
+              <a:pPr>
+                <a:lnSpc>
+                  <a:spcPts val="2300"/>
+                </a:lnSpc>
+                <a:buAutoNum type="alphaLcPeriod" startAt="4"/>
+              </a:pPr>
+              <a:r>
+                <a:rPr sz="1800">
+                  <a:solidFill>
+                    <a:srgbClr val="102238"/>
+                  </a:solidFill>
+                </a:rPr>
+                <a:t>步骤一</a:t>
+              </a:r>
+            </a:p>
+            <a:p>
+              <a:pPr>
+                <a:lnSpc>
+                  <a:spcPts val="2300"/>
+                </a:lnSpc>
+                <a:buAutoNum type="alphaLcPeriod"/>
+              </a:pPr>
+              <a:r>
+                <a:rPr sz="1800">
+                  <a:solidFill>
+                    <a:srgbClr val="102238"/>
+                  </a:solidFill>
+                </a:rPr>
+                <a:t>步骤二</a:t>
+              </a:r>
+            </a:p>
+          </p:txBody>
+        </p:sp>
+        <p:sp>
+          <p:nvSpPr>
+            <p:cNvPr id="20" name="Compatibility explanation"/>
+            <p:cNvSpPr txBox="1"/>
+            <p:nvPr/>
+          </p:nvSpPr>
+          <p:spPr>
+            <a:xfrm>
+              <a:off x="3352800" y="2743200"/>
+              <a:ext cx="2641600" cy="304800"/>
+            </a:xfrm>
+            <a:noFill/>
+          </p:spPr>
+          <p:txBody>
+            <a:bodyPr wrap="none" lIns="0" rIns="0" tIns="0" bIns="0"/>
+            <a:lstStyle/>
+            <a:p>
+              <a:r>
+                <a:rPr sz="1600">
+                  <a:solidFill>
+                    <a:srgbClr val="24745C"/>
+                  </a:solidFill>
+                </a:rPr>
+                <a:t>小写字母 · 右括号</a:t>
+              </a:r>
+            </a:p>
+          </p:txBody>
+        </p:sp>
+        <p:sp>
+          <p:nvSpPr>
+            <p:cNvPr id="21" name="Compatibility explanation"/>
+            <p:cNvSpPr txBox="1"/>
+            <p:nvPr/>
+          </p:nvSpPr>
+          <p:spPr>
+            <a:xfrm>
+              <a:off x="3352800" y="3073400"/>
+              <a:ext cx="2641600" cy="685800"/>
+            </a:xfrm>
+            <a:noFill/>
+          </p:spPr>
+          <p:txBody>
+            <a:bodyPr wrap="none" lIns="0" rIns="0" tIns="0" bIns="0"/>
+            <a:lstStyle/>
+            <a:p>
+              <a:pPr>
+                <a:lnSpc>
+                  <a:spcPts val="2300"/>
+                </a:lnSpc>
+                <a:buAutoNum type="alphaLcParenR" startAt="4"/>
+              </a:pPr>
+              <a:r>
+                <a:rPr sz="1800">
+                  <a:solidFill>
+                    <a:srgbClr val="102238"/>
+                  </a:solidFill>
+                </a:rPr>
+                <a:t>步骤一</a:t>
+              </a:r>
+            </a:p>
+            <a:p>
+              <a:pPr>
+                <a:lnSpc>
+                  <a:spcPts val="2300"/>
+                </a:lnSpc>
+                <a:buAutoNum type="alphaLcParenR"/>
+              </a:pPr>
+              <a:r>
+                <a:rPr sz="1800">
+                  <a:solidFill>
+                    <a:srgbClr val="102238"/>
+                  </a:solidFill>
+                </a:rPr>
+                <a:t>步骤二</a:t>
+              </a:r>
+            </a:p>
+          </p:txBody>
+        </p:sp>
+        <p:sp>
+          <p:nvSpPr>
+            <p:cNvPr id="22" name="Compatibility explanation"/>
+            <p:cNvSpPr txBox="1"/>
+            <p:nvPr/>
+          </p:nvSpPr>
+          <p:spPr>
+            <a:xfrm>
+              <a:off x="6197600" y="2743200"/>
+              <a:ext cx="2641600" cy="304800"/>
+            </a:xfrm>
+            <a:noFill/>
+          </p:spPr>
+          <p:txBody>
+            <a:bodyPr wrap="none" lIns="0" rIns="0" tIns="0" bIns="0"/>
+            <a:lstStyle/>
+            <a:p>
+              <a:r>
+                <a:rPr sz="1600">
+                  <a:solidFill>
+                    <a:srgbClr val="24745C"/>
+                  </a:solidFill>
+                </a:rPr>
+                <a:t>小写字母 · 双括号</a:t>
+              </a:r>
+            </a:p>
+          </p:txBody>
+        </p:sp>
+        <p:sp>
+          <p:nvSpPr>
+            <p:cNvPr id="23" name="Compatibility explanation"/>
+            <p:cNvSpPr txBox="1"/>
+            <p:nvPr/>
+          </p:nvSpPr>
+          <p:spPr>
+            <a:xfrm>
+              <a:off x="6197600" y="3073400"/>
+              <a:ext cx="2641600" cy="685800"/>
+            </a:xfrm>
+            <a:noFill/>
+          </p:spPr>
+          <p:txBody>
+            <a:bodyPr wrap="none" lIns="0" rIns="0" tIns="0" bIns="0"/>
+            <a:lstStyle/>
+            <a:p>
+              <a:pPr>
+                <a:lnSpc>
+                  <a:spcPts val="2300"/>
+                </a:lnSpc>
+                <a:buAutoNum type="alphaLcParenBoth" startAt="4"/>
+              </a:pPr>
+              <a:r>
+                <a:rPr sz="1800">
+                  <a:solidFill>
+                    <a:srgbClr val="102238"/>
+                  </a:solidFill>
+                </a:rPr>
+                <a:t>步骤一</a:t>
+              </a:r>
+            </a:p>
+            <a:p>
+              <a:pPr>
+                <a:lnSpc>
+                  <a:spcPts val="2300"/>
+                </a:lnSpc>
+                <a:buAutoNum type="alphaLcParenBoth"/>
+              </a:pPr>
+              <a:r>
+                <a:rPr sz="1800">
+                  <a:solidFill>
+                    <a:srgbClr val="102238"/>
+                  </a:solidFill>
+                </a:rPr>
+                <a:t>步骤二</a:t>
+              </a:r>
+            </a:p>
+          </p:txBody>
+        </p:sp>
+        <p:sp>
+          <p:nvSpPr>
+            <p:cNvPr id="24" name="Compatibility explanation"/>
+            <p:cNvSpPr txBox="1"/>
+            <p:nvPr/>
+          </p:nvSpPr>
+          <p:spPr>
+            <a:xfrm>
+              <a:off x="9042400" y="2743200"/>
+              <a:ext cx="2641600" cy="304800"/>
+            </a:xfrm>
+            <a:noFill/>
+          </p:spPr>
+          <p:txBody>
+            <a:bodyPr wrap="none" lIns="0" rIns="0" tIns="0" bIns="0"/>
+            <a:lstStyle/>
+            <a:p>
+              <a:r>
+                <a:rPr sz="1600">
+                  <a:solidFill>
+                    <a:srgbClr val="24745C"/>
+                  </a:solidFill>
+                </a:rPr>
+                <a:t>大写字母 · 句点</a:t>
+              </a:r>
+            </a:p>
+          </p:txBody>
+        </p:sp>
+        <p:sp>
+          <p:nvSpPr>
+            <p:cNvPr id="25" name="Compatibility explanation"/>
+            <p:cNvSpPr txBox="1"/>
+            <p:nvPr/>
+          </p:nvSpPr>
+          <p:spPr>
+            <a:xfrm>
+              <a:off x="9042400" y="3073400"/>
+              <a:ext cx="2641600" cy="685800"/>
+            </a:xfrm>
+            <a:noFill/>
+          </p:spPr>
+          <p:txBody>
+            <a:bodyPr wrap="none" lIns="0" rIns="0" tIns="0" bIns="0"/>
+            <a:lstStyle/>
+            <a:p>
+              <a:pPr>
+                <a:lnSpc>
+                  <a:spcPts val="2300"/>
+                </a:lnSpc>
+                <a:buAutoNum type="alphaUcPeriod" startAt="4"/>
+              </a:pPr>
+              <a:r>
+                <a:rPr sz="1800">
+                  <a:solidFill>
+                    <a:srgbClr val="102238"/>
+                  </a:solidFill>
+                </a:rPr>
+                <a:t>步骤一</a:t>
+              </a:r>
+            </a:p>
+            <a:p>
+              <a:pPr>
+                <a:lnSpc>
+                  <a:spcPts val="2300"/>
+                </a:lnSpc>
+                <a:buAutoNum type="alphaUcPeriod"/>
+              </a:pPr>
+              <a:r>
+                <a:rPr sz="1800">
+                  <a:solidFill>
+                    <a:srgbClr val="102238"/>
+                  </a:solidFill>
+                </a:rPr>
+                <a:t>步骤二</a:t>
+              </a:r>
+            </a:p>
+          </p:txBody>
+        </p:sp>
+        <p:sp>
+          <p:nvSpPr>
+            <p:cNvPr id="26" name="Compatibility explanation"/>
+            <p:cNvSpPr txBox="1"/>
+            <p:nvPr/>
+          </p:nvSpPr>
+          <p:spPr>
+            <a:xfrm>
+              <a:off x="508000" y="3886200"/>
+              <a:ext cx="2641600" cy="304800"/>
+            </a:xfrm>
+            <a:noFill/>
+          </p:spPr>
+          <p:txBody>
+            <a:bodyPr wrap="none" lIns="0" rIns="0" tIns="0" bIns="0"/>
+            <a:lstStyle/>
+            <a:p>
+              <a:r>
+                <a:rPr sz="1600">
+                  <a:solidFill>
+                    <a:srgbClr val="24745C"/>
+                  </a:solidFill>
+                </a:rPr>
+                <a:t>大写字母 · 右括号</a:t>
+              </a:r>
+            </a:p>
+          </p:txBody>
+        </p:sp>
+        <p:sp>
+          <p:nvSpPr>
+            <p:cNvPr id="27" name="Compatibility explanation"/>
+            <p:cNvSpPr txBox="1"/>
+            <p:nvPr/>
+          </p:nvSpPr>
+          <p:spPr>
+            <a:xfrm>
+              <a:off x="508000" y="4216400"/>
+              <a:ext cx="2641600" cy="685800"/>
+            </a:xfrm>
+            <a:noFill/>
+          </p:spPr>
+          <p:txBody>
+            <a:bodyPr wrap="none" lIns="0" rIns="0" tIns="0" bIns="0"/>
+            <a:lstStyle/>
+            <a:p>
+              <a:pPr>
+                <a:lnSpc>
+                  <a:spcPts val="2300"/>
+                </a:lnSpc>
+                <a:buAutoNum type="alphaUcParenR" startAt="4"/>
+              </a:pPr>
+              <a:r>
+                <a:rPr sz="1800">
+                  <a:solidFill>
+                    <a:srgbClr val="102238"/>
+                  </a:solidFill>
+                </a:rPr>
+                <a:t>步骤一</a:t>
+              </a:r>
+            </a:p>
+            <a:p>
+              <a:pPr>
+                <a:lnSpc>
+                  <a:spcPts val="2300"/>
+                </a:lnSpc>
+                <a:buAutoNum type="alphaUcParenR"/>
+              </a:pPr>
+              <a:r>
+                <a:rPr sz="1800">
+                  <a:solidFill>
+                    <a:srgbClr val="102238"/>
+                  </a:solidFill>
+                </a:rPr>
+                <a:t>步骤二</a:t>
+              </a:r>
+            </a:p>
+          </p:txBody>
+        </p:sp>
+        <p:sp>
+          <p:nvSpPr>
+            <p:cNvPr id="28" name="Compatibility explanation"/>
+            <p:cNvSpPr txBox="1"/>
+            <p:nvPr/>
+          </p:nvSpPr>
+          <p:spPr>
+            <a:xfrm>
+              <a:off x="3352800" y="3886200"/>
+              <a:ext cx="2641600" cy="304800"/>
+            </a:xfrm>
+            <a:noFill/>
+          </p:spPr>
+          <p:txBody>
+            <a:bodyPr wrap="none" lIns="0" rIns="0" tIns="0" bIns="0"/>
+            <a:lstStyle/>
+            <a:p>
+              <a:r>
+                <a:rPr sz="1600">
+                  <a:solidFill>
+                    <a:srgbClr val="24745C"/>
+                  </a:solidFill>
+                </a:rPr>
+                <a:t>大写字母 · 双括号</a:t>
+              </a:r>
+            </a:p>
+          </p:txBody>
+        </p:sp>
+        <p:sp>
+          <p:nvSpPr>
+            <p:cNvPr id="29" name="Compatibility explanation"/>
+            <p:cNvSpPr txBox="1"/>
+            <p:nvPr/>
+          </p:nvSpPr>
+          <p:spPr>
+            <a:xfrm>
+              <a:off x="3352800" y="4216400"/>
+              <a:ext cx="2641600" cy="685800"/>
+            </a:xfrm>
+            <a:noFill/>
+          </p:spPr>
+          <p:txBody>
+            <a:bodyPr wrap="none" lIns="0" rIns="0" tIns="0" bIns="0"/>
+            <a:lstStyle/>
+            <a:p>
+              <a:pPr>
+                <a:lnSpc>
+                  <a:spcPts val="2300"/>
+                </a:lnSpc>
+                <a:buAutoNum type="alphaUcParenBoth" startAt="4"/>
+              </a:pPr>
+              <a:r>
+                <a:rPr sz="1800">
+                  <a:solidFill>
+                    <a:srgbClr val="102238"/>
+                  </a:solidFill>
+                </a:rPr>
+                <a:t>步骤一</a:t>
+              </a:r>
+            </a:p>
+            <a:p>
+              <a:pPr>
+                <a:lnSpc>
+                  <a:spcPts val="2300"/>
+                </a:lnSpc>
+                <a:buAutoNum type="alphaUcParenBoth"/>
+              </a:pPr>
+              <a:r>
+                <a:rPr sz="1800">
+                  <a:solidFill>
+                    <a:srgbClr val="102238"/>
+                  </a:solidFill>
+                </a:rPr>
+                <a:t>步骤二</a:t>
+              </a:r>
+            </a:p>
+          </p:txBody>
+        </p:sp>
+        <p:sp>
+          <p:nvSpPr>
+            <p:cNvPr id="30" name="Compatibility explanation"/>
+            <p:cNvSpPr txBox="1"/>
+            <p:nvPr/>
+          </p:nvSpPr>
+          <p:spPr>
+            <a:xfrm>
+              <a:off x="6197600" y="3886200"/>
+              <a:ext cx="2641600" cy="304800"/>
+            </a:xfrm>
+            <a:noFill/>
+          </p:spPr>
+          <p:txBody>
+            <a:bodyPr wrap="none" lIns="0" rIns="0" tIns="0" bIns="0"/>
+            <a:lstStyle/>
+            <a:p>
+              <a:r>
+                <a:rPr sz="1600">
+                  <a:solidFill>
+                    <a:srgbClr val="24745C"/>
+                  </a:solidFill>
+                </a:rPr>
+                <a:t>小写罗马 · 句点</a:t>
+              </a:r>
+            </a:p>
+          </p:txBody>
+        </p:sp>
+        <p:sp>
+          <p:nvSpPr>
+            <p:cNvPr id="31" name="Compatibility explanation"/>
+            <p:cNvSpPr txBox="1"/>
+            <p:nvPr/>
+          </p:nvSpPr>
+          <p:spPr>
+            <a:xfrm>
+              <a:off x="6197600" y="4216400"/>
+              <a:ext cx="2641600" cy="685800"/>
+            </a:xfrm>
+            <a:noFill/>
+          </p:spPr>
+          <p:txBody>
+            <a:bodyPr wrap="none" lIns="0" rIns="0" tIns="0" bIns="0"/>
+            <a:lstStyle/>
+            <a:p>
+              <a:pPr>
+                <a:lnSpc>
+                  <a:spcPts val="2300"/>
+                </a:lnSpc>
+                <a:buAutoNum type="romanLcPeriod" startAt="4"/>
+              </a:pPr>
+              <a:r>
+                <a:rPr sz="1800">
+                  <a:solidFill>
+                    <a:srgbClr val="102238"/>
+                  </a:solidFill>
+                </a:rPr>
+                <a:t>步骤一</a:t>
+              </a:r>
+            </a:p>
+            <a:p>
+              <a:pPr>
+                <a:lnSpc>
+                  <a:spcPts val="2300"/>
+                </a:lnSpc>
+                <a:buAutoNum type="romanLcPeriod"/>
+              </a:pPr>
+              <a:r>
+                <a:rPr sz="1800">
+                  <a:solidFill>
+                    <a:srgbClr val="102238"/>
+                  </a:solidFill>
+                </a:rPr>
+                <a:t>步骤二</a:t>
+              </a:r>
+            </a:p>
+          </p:txBody>
+        </p:sp>
+        <p:sp>
+          <p:nvSpPr>
+            <p:cNvPr id="32" name="Compatibility explanation"/>
+            <p:cNvSpPr txBox="1"/>
+            <p:nvPr/>
+          </p:nvSpPr>
+          <p:spPr>
+            <a:xfrm>
+              <a:off x="9042400" y="3886200"/>
+              <a:ext cx="2641600" cy="304800"/>
+            </a:xfrm>
+            <a:noFill/>
+          </p:spPr>
+          <p:txBody>
+            <a:bodyPr wrap="none" lIns="0" rIns="0" tIns="0" bIns="0"/>
+            <a:lstStyle/>
+            <a:p>
+              <a:r>
+                <a:rPr sz="1600">
+                  <a:solidFill>
+                    <a:srgbClr val="24745C"/>
+                  </a:solidFill>
+                </a:rPr>
+                <a:t>小写罗马 · 右括号</a:t>
+              </a:r>
+            </a:p>
+          </p:txBody>
+        </p:sp>
+        <p:sp>
+          <p:nvSpPr>
+            <p:cNvPr id="33" name="Compatibility explanation"/>
+            <p:cNvSpPr txBox="1"/>
+            <p:nvPr/>
+          </p:nvSpPr>
+          <p:spPr>
+            <a:xfrm>
+              <a:off x="9042400" y="4216400"/>
+              <a:ext cx="2641600" cy="685800"/>
+            </a:xfrm>
+            <a:noFill/>
+          </p:spPr>
+          <p:txBody>
+            <a:bodyPr wrap="none" lIns="0" rIns="0" tIns="0" bIns="0"/>
+            <a:lstStyle/>
+            <a:p>
+              <a:pPr>
+                <a:lnSpc>
+                  <a:spcPts val="2300"/>
+                </a:lnSpc>
+                <a:buAutoNum type="romanLcParenR" startAt="4"/>
+              </a:pPr>
+              <a:r>
+                <a:rPr sz="1800">
+                  <a:solidFill>
+                    <a:srgbClr val="102238"/>
+                  </a:solidFill>
+                </a:rPr>
+                <a:t>步骤一</a:t>
+              </a:r>
+            </a:p>
+            <a:p>
+              <a:pPr>
+                <a:lnSpc>
+                  <a:spcPts val="2300"/>
+                </a:lnSpc>
+                <a:buAutoNum type="romanLcParenR"/>
+              </a:pPr>
+              <a:r>
+                <a:rPr sz="1800">
+                  <a:solidFill>
+                    <a:srgbClr val="102238"/>
+                  </a:solidFill>
+                </a:rPr>
+                <a:t>步骤二</a:t>
+              </a:r>
+            </a:p>
+          </p:txBody>
+        </p:sp>
+        <p:sp>
+          <p:nvSpPr>
+            <p:cNvPr id="34" name="Compatibility explanation"/>
+            <p:cNvSpPr txBox="1"/>
+            <p:nvPr/>
+          </p:nvSpPr>
+          <p:spPr>
+            <a:xfrm>
+              <a:off x="508000" y="5029200"/>
+              <a:ext cx="2641600" cy="304800"/>
+            </a:xfrm>
+            <a:noFill/>
+          </p:spPr>
+          <p:txBody>
+            <a:bodyPr wrap="none" lIns="0" rIns="0" tIns="0" bIns="0"/>
+            <a:lstStyle/>
+            <a:p>
+              <a:r>
+                <a:rPr sz="1600">
+                  <a:solidFill>
+                    <a:srgbClr val="24745C"/>
+                  </a:solidFill>
+                </a:rPr>
+                <a:t>小写罗马 · 双括号</a:t>
+              </a:r>
+            </a:p>
+          </p:txBody>
+        </p:sp>
+        <p:sp>
+          <p:nvSpPr>
+            <p:cNvPr id="35" name="Compatibility explanation"/>
+            <p:cNvSpPr txBox="1"/>
+            <p:nvPr/>
+          </p:nvSpPr>
+          <p:spPr>
+            <a:xfrm>
+              <a:off x="508000" y="5359400"/>
+              <a:ext cx="2641600" cy="685800"/>
+            </a:xfrm>
+            <a:noFill/>
+          </p:spPr>
+          <p:txBody>
+            <a:bodyPr wrap="none" lIns="0" rIns="0" tIns="0" bIns="0"/>
+            <a:lstStyle/>
+            <a:p>
+              <a:pPr>
+                <a:lnSpc>
+                  <a:spcPts val="2300"/>
+                </a:lnSpc>
+                <a:buAutoNum type="romanLcParenBoth" startAt="4"/>
+              </a:pPr>
+              <a:r>
+                <a:rPr sz="1800">
+                  <a:solidFill>
+                    <a:srgbClr val="102238"/>
+                  </a:solidFill>
+                </a:rPr>
+                <a:t>步骤一</a:t>
+              </a:r>
+            </a:p>
+            <a:p>
+              <a:pPr>
+                <a:lnSpc>
+                  <a:spcPts val="2300"/>
+                </a:lnSpc>
+                <a:buAutoNum type="romanLcParenBoth"/>
+              </a:pPr>
+              <a:r>
+                <a:rPr sz="1800">
+                  <a:solidFill>
+                    <a:srgbClr val="102238"/>
+                  </a:solidFill>
+                </a:rPr>
+                <a:t>步骤二</a:t>
+              </a:r>
+            </a:p>
+          </p:txBody>
+        </p:sp>
+        <p:sp>
+          <p:nvSpPr>
+            <p:cNvPr id="36" name="Compatibility explanation"/>
+            <p:cNvSpPr txBox="1"/>
+            <p:nvPr/>
+          </p:nvSpPr>
+          <p:spPr>
+            <a:xfrm>
+              <a:off x="3352800" y="5029200"/>
+              <a:ext cx="2641600" cy="304800"/>
+            </a:xfrm>
+            <a:noFill/>
+          </p:spPr>
+          <p:txBody>
+            <a:bodyPr wrap="none" lIns="0" rIns="0" tIns="0" bIns="0"/>
+            <a:lstStyle/>
+            <a:p>
+              <a:r>
+                <a:rPr sz="1600">
+                  <a:solidFill>
+                    <a:srgbClr val="24745C"/>
+                  </a:solidFill>
+                </a:rPr>
+                <a:t>大写罗马 · 句点</a:t>
+              </a:r>
+            </a:p>
+          </p:txBody>
+        </p:sp>
+        <p:sp>
+          <p:nvSpPr>
+            <p:cNvPr id="37" name="Compatibility explanation"/>
+            <p:cNvSpPr txBox="1"/>
+            <p:nvPr/>
+          </p:nvSpPr>
+          <p:spPr>
+            <a:xfrm>
+              <a:off x="3352800" y="5359400"/>
+              <a:ext cx="2641600" cy="685800"/>
+            </a:xfrm>
+            <a:noFill/>
+          </p:spPr>
+          <p:txBody>
+            <a:bodyPr wrap="none" lIns="0" rIns="0" tIns="0" bIns="0"/>
+            <a:lstStyle/>
+            <a:p>
+              <a:pPr>
+                <a:lnSpc>
+                  <a:spcPts val="2300"/>
+                </a:lnSpc>
+                <a:buAutoNum type="romanUcPeriod" startAt="4"/>
+              </a:pPr>
+              <a:r>
+                <a:rPr sz="1800">
+                  <a:solidFill>
+                    <a:srgbClr val="102238"/>
+                  </a:solidFill>
+                </a:rPr>
+                <a:t>步骤一</a:t>
+              </a:r>
+            </a:p>
+            <a:p>
+              <a:pPr>
+                <a:lnSpc>
+                  <a:spcPts val="2300"/>
+                </a:lnSpc>
+                <a:buAutoNum type="romanUcPeriod"/>
+              </a:pPr>
+              <a:r>
+                <a:rPr sz="1800">
+                  <a:solidFill>
+                    <a:srgbClr val="102238"/>
+                  </a:solidFill>
+                </a:rPr>
+                <a:t>步骤二</a:t>
+              </a:r>
+            </a:p>
+          </p:txBody>
+        </p:sp>
+        <p:sp>
+          <p:nvSpPr>
+            <p:cNvPr id="38" name="Compatibility explanation"/>
+            <p:cNvSpPr txBox="1"/>
+            <p:nvPr/>
+          </p:nvSpPr>
+          <p:spPr>
+            <a:xfrm>
+              <a:off x="6197600" y="5029200"/>
+              <a:ext cx="2641600" cy="304800"/>
+            </a:xfrm>
+            <a:noFill/>
+          </p:spPr>
+          <p:txBody>
+            <a:bodyPr wrap="none" lIns="0" rIns="0" tIns="0" bIns="0"/>
+            <a:lstStyle/>
+            <a:p>
+              <a:r>
+                <a:rPr sz="1600">
+                  <a:solidFill>
+                    <a:srgbClr val="24745C"/>
+                  </a:solidFill>
+                </a:rPr>
+                <a:t>大写罗马 · 右括号</a:t>
+              </a:r>
+            </a:p>
+          </p:txBody>
+        </p:sp>
+        <p:sp>
+          <p:nvSpPr>
+            <p:cNvPr id="39" name="Compatibility explanation"/>
+            <p:cNvSpPr txBox="1"/>
+            <p:nvPr/>
+          </p:nvSpPr>
+          <p:spPr>
+            <a:xfrm>
+              <a:off x="6197600" y="5359400"/>
+              <a:ext cx="2641600" cy="685800"/>
+            </a:xfrm>
+            <a:noFill/>
+          </p:spPr>
+          <p:txBody>
+            <a:bodyPr wrap="none" lIns="0" rIns="0" tIns="0" bIns="0"/>
+            <a:lstStyle/>
+            <a:p>
+              <a:pPr>
+                <a:lnSpc>
+                  <a:spcPts val="2300"/>
+                </a:lnSpc>
+                <a:buAutoNum type="romanUcParenR" startAt="4"/>
+              </a:pPr>
+              <a:r>
+                <a:rPr sz="1800">
+                  <a:solidFill>
+                    <a:srgbClr val="102238"/>
+                  </a:solidFill>
+                </a:rPr>
+                <a:t>步骤一</a:t>
+              </a:r>
+            </a:p>
+            <a:p>
+              <a:pPr>
+                <a:lnSpc>
+                  <a:spcPts val="2300"/>
+                </a:lnSpc>
+                <a:buAutoNum type="romanUcParenR"/>
+              </a:pPr>
+              <a:r>
+                <a:rPr sz="1800">
+                  <a:solidFill>
+                    <a:srgbClr val="102238"/>
+                  </a:solidFill>
+                </a:rPr>
+                <a:t>步骤二</a:t>
+              </a:r>
+            </a:p>
+          </p:txBody>
+        </p:sp>
+        <p:sp>
+          <p:nvSpPr>
+            <p:cNvPr id="40" name="Compatibility explanation"/>
+            <p:cNvSpPr txBox="1"/>
+            <p:nvPr/>
+          </p:nvSpPr>
+          <p:spPr>
+            <a:xfrm>
+              <a:off x="9042400" y="5029200"/>
+              <a:ext cx="2641600" cy="304800"/>
+            </a:xfrm>
+            <a:noFill/>
+          </p:spPr>
+          <p:txBody>
+            <a:bodyPr wrap="none" lIns="0" rIns="0" tIns="0" bIns="0"/>
+            <a:lstStyle/>
+            <a:p>
+              <a:r>
+                <a:rPr sz="1600">
+                  <a:solidFill>
+                    <a:srgbClr val="24745C"/>
+                  </a:solidFill>
+                </a:rPr>
+                <a:t>大写罗马 · 双括号</a:t>
+              </a:r>
+            </a:p>
+          </p:txBody>
+        </p:sp>
+        <p:sp>
+          <p:nvSpPr>
+            <p:cNvPr id="41" name="Compatibility explanation"/>
+            <p:cNvSpPr txBox="1"/>
+            <p:nvPr/>
+          </p:nvSpPr>
+          <p:spPr>
+            <a:xfrm>
+              <a:off x="9042400" y="5359400"/>
+              <a:ext cx="2641600" cy="685800"/>
+            </a:xfrm>
+            <a:noFill/>
+          </p:spPr>
+          <p:txBody>
+            <a:bodyPr wrap="none" lIns="0" rIns="0" tIns="0" bIns="0"/>
+            <a:lstStyle/>
+            <a:p>
+              <a:pPr>
+                <a:lnSpc>
+                  <a:spcPts val="2300"/>
+                </a:lnSpc>
+                <a:buAutoNum type="romanUcParenBoth" startAt="4"/>
+              </a:pPr>
+              <a:r>
+                <a:rPr sz="1800">
+                  <a:solidFill>
+                    <a:srgbClr val="102238"/>
+                  </a:solidFill>
+                </a:rPr>
+                <a:t>步骤一</a:t>
+              </a:r>
+            </a:p>
+            <a:p>
+              <a:pPr>
+                <a:lnSpc>
+                  <a:spcPts val="2300"/>
+                </a:lnSpc>
+                <a:buAutoNum type="romanUcParenBoth"/>
+              </a:pPr>
+              <a:r>
+                <a:rPr sz="1800">
+                  <a:solidFill>
+                    <a:srgbClr val="102238"/>
+                  </a:solidFill>
+                </a:rPr>
+                <a:t>步骤二</a:t>
+              </a:r>
+            </a:p>
+          </p:txBody>
+        </p:sp>
+        <p:sp>
+          <p:nvSpPr>
+            <p:cNvPr id="4" name="Compatibility explanation"/>
+            <p:cNvSpPr txBox="1"/>
+            <p:nvPr/>
+          </p:nvSpPr>
+          <p:spPr>
+            <a:xfrm>
+              <a:off x="508000" y="6375400"/>
+              <a:ext cx="11176000" cy="304800"/>
+            </a:xfrm>
+            <a:noFill/>
+          </p:spPr>
+          <p:txBody>
+            <a:bodyPr wrap="none" lIns="0" rIns="0" tIns="0" bIns="0"/>
+            <a:lstStyle/>
+            <a:p>
+              <a:r>
+                <a:rPr sz="1600">
+                  <a:solidFill>
+                    <a:srgbClr val="102238"/>
+                  </a:solidFill>
+                </a:rPr>
+                <a:t>预期：编号依次为 4/5、d/e、D/E、iv/v 或 IV/V，标点保持各组格式。</a:t>
+              </a:r>
+            </a:p>
+          </p:txBody>
+        </p:sp>
+      </p:grpSp>
+    </p:spTree>
+  </p:cSld>
+</p:sld>
+</file>
+
+<file path=ppt/showcase/compatibility/theme/theme1.xml><?xml version="1.0" encoding="utf-8"?>
+<a:theme xmlns:a="http://schemas.openxmlformats.org/drawingml/2006/main" name="Fixture theme">
+  <a:themeElements>
+    <a:clrScheme name="Fixture colors">
+      <a:dk1>
+        <a:srgbClr val="202124"/>
+      </a:dk1>
+      <a:lt1>
+        <a:srgbClr val="FFFFFF"/>
+      </a:lt1>
+      <a:dk2>
+        <a:srgbClr val="112233"/>
+      </a:dk2>
+      <a:lt2>
+        <a:srgbClr val="F4F7FA"/>
+      </a:lt2>
+      <a:accent1>
+        <a:srgbClr val="2A9D8F"/>
+      </a:accent1>
+      <a:accent2>
+        <a:srgbClr val="E9C46A"/>
+      </a:accent2>
+      <a:accent3>
+        <a:srgbClr val="E76F51"/>
+      </a:accent3>
+      <a:accent4>
+        <a:srgbClr val="457B9D"/>
+      </a:accent4>
+      <a:accent5>
+        <a:srgbClr val="8F5D9F"/>
+      </a:accent5>
+      <a:accent6>
+        <a:srgbClr val="6A994E"/>
+      </a:accent6>
+      <a:hlink>
+        <a:srgbClr val="0563C1"/>
+      </a:hlink>
+      <a:folHlink>
+        <a:srgbClr val="954F72"/>
+      </a:folHlink>
+    </a:clrScheme>
+    <a:fontScheme name="Fixture fonts">
+      <a:majorFont>
+        <a:latin typeface="Arial"/>
+        <a:ea typeface=""/>
+        <a:cs typeface=""/>
+        <a:font script="Hans" typeface="Microsoft YaHei"/>
+      </a:majorFont>
+      <a:minorFont>
+        <a:latin typeface="Arial"/>
+        <a:ea typeface=""/>
+        <a:cs typeface=""/>
+        <a:font script="Hans" typeface="Microsoft YaHei"/>
+      </a:minorFont>
+    </a:fontScheme>
+    <a:fmtScheme name="Fixture format">
+      <a:fillStyleLst>
+        <a:solidFill>
+          <a:schemeClr val="phClr"/>
+        </a:solidFill>
+        <a:solidFill>
+          <a:schemeClr val="phClr"/>
+        </a:solidFill>
+        <a:solidFill>
+          <a:schemeClr val="phClr"/>
+        </a:solidFill>
+      </a:fillStyleLst>
+      <a:lnStyleLst>
+        <a:ln w="12700" cap="flat" cmpd="sng" algn="ctr">
+          <a:solidFill>
+            <a:schemeClr val="phClr"/>
+          </a:solidFill>
+          <a:prstDash val="solid"/>
+          <a:miter lim="800000"/>
+          <a:headEnd type="none" w="med" len="med"/>
+          <a:tailEnd type="none" w="med" len="med"/>
+        </a:ln>
+        <a:ln w="25400" cap="flat" cmpd="sng" algn="ctr">
+          <a:solidFill>
+            <a:schemeClr val="phClr"/>
+          </a:solidFill>
+          <a:prstDash val="solid"/>
+          <a:miter lim="800000"/>
+          <a:headEnd type="none" w="med" len="med"/>
+          <a:tailEnd type="none" w="med" len="med"/>
+        </a:ln>
+        <a:ln w="38100" cap="flat" cmpd="sng" algn="ctr">
+          <a:solidFill>
+            <a:schemeClr val="phClr"/>
+          </a:solidFill>
+          <a:prstDash val="solid"/>
+          <a:miter lim="800000"/>
+          <a:headEnd type="none" w="med" len="med"/>
+          <a:tailEnd type="none" w="med" len="med"/>
+        </a:ln>
+      </a:lnStyleLst>
+      <a:effectStyleLst>
+        <a:effectStyle>
+          <a:effectLst/>
+        </a:effectStyle>
+        <a:effectStyle>
+          <a:effectLst/>
+        </a:effectStyle>
+        <a:effectStyle>
+          <a:effectLst/>
+        </a:effectStyle>
+      </a:effectStyleLst>
+      <a:bgFillStyleLst>
+        <a:solidFill>
+          <a:schemeClr val="phClr"/>
+        </a:solidFill>
+        <a:solidFill>
+          <a:schemeClr val="phClr"/>
+        </a:solidFill>
+        <a:solidFill>
+          <a:schemeClr val="phClr"/>
+        </a:solidFill>
+      </a:bgFillStyleLst>
+    </a:fmtScheme>
+  </a:themeElements>
+</a:theme>
+</file>
+
 <file path=ppt/showcase/typography/slideLayouts/slideLayout1.xml><?xml version="1.0" encoding="utf-8"?>
 <p:sldLayout xmlns:p="http://schemas.openxmlformats.org/presentationml/2006/main" xmlns:a="http://schemas.openxmlformats.org/drawingml/2006/main" type="blank" preserve="1">
   <p:cSld name="Blank">
@@ -7428,7 +9578,7 @@
             </a:pPr>
             <a:r>
               <a:rPr sz="1800"/>
-              <a:t>7 组主题，15 页样例。按展示条件核对预期效果，细节可放大查看。</a:t>
+              <a:t>8 组主题，17 页样例。按展示条件核对预期效果，细节可放大查看。</a:t>
             </a:r>
           </a:p>
           <a:p>
@@ -7508,6 +9658,17 @@
               <a:t>14-16    背景：继承、透明图片与图形变换</a:t>
             </a:r>
           </a:p>
+          <a:p>
+            <a:pPr>
+              <a:spcAft>
+                <a:spcPts val="1400"/>
+              </a:spcAft>
+            </a:pPr>
+            <a:r>
+              <a:rPr sz="2200"/>
+              <a:t>17-18    兼容补充：自动编号与预设图形</a:t>
+            </a:r>
+          </a:p>
         </p:txBody>
       </p:sp>
     </p:spTree>
